--- a/dist/초3/국어/문학과매체/초3_국어_문학과매체_01_인물의마음과까닭_학생용.pptx
+++ b/dist/초3/국어/문학과매체/초3_국어_문학과매체_01_인물의마음과까닭_학생용.pptx
@@ -118,13 +118,13 @@
   <p:extLst>
     <p:ext uri="{521415D9-36F7-43E2-AB2F-B90AF26B5E84}">
       <p14:sectionLst xmlns:p14="http://schemas.microsoft.com/office/powerpoint/2010/main">
-        <p14:section name="도입" id="{a346983d-cc0f-d924-6724-e53de307aa63}">
+        <p14:section name="도입" id="{7dc286fe-4647-fffe-a6cf-b740caef0308}">
           <p14:sldIdLst>
             <p14:sldId id="256"/>
             <p14:sldId id="257"/>
           </p14:sldIdLst>
         </p14:section>
-        <p14:section name="개념" id="{935dab99-e50b-d698-70cf-efcd5ff52802}">
+        <p14:section name="개념" id="{d16e2a35-f4e8-b981-b11b-c81be4eba648}">
           <p14:sldIdLst>
             <p14:sldId id="258"/>
             <p14:sldId id="259"/>
@@ -132,24 +132,24 @@
             <p14:sldId id="261"/>
           </p14:sldIdLst>
         </p14:section>
-        <p14:section name="연습" id="{f500a85d-a72c-8bca-3f60-b5a4f4fc1b87}">
+        <p14:section name="연습" id="{06e96b9c-2853-d48b-c42b-71ea0a6b8a93}">
           <p14:sldIdLst>
             <p14:sldId id="262"/>
             <p14:sldId id="263"/>
           </p14:sldIdLst>
         </p14:section>
-        <p14:section name="확인" id="{6cbf5d12-2340-dbaf-4114-e5b8b3458ac9}">
+        <p14:section name="확인" id="{e9b22bb5-e060-3d46-69fd-66f21bae191d}">
           <p14:sldIdLst>
             <p14:sldId id="264"/>
             <p14:sldId id="265"/>
           </p14:sldIdLst>
         </p14:section>
-        <p14:section name="정리" id="{e74a5acc-1018-890b-3171-ebb7db41b0a4}">
+        <p14:section name="정리" id="{b8e82792-3978-3b85-8f0a-aa8283b9e1b4}">
           <p14:sldIdLst>
             <p14:sldId id="266"/>
           </p14:sldIdLst>
         </p14:section>
-        <p14:section name="보충" id="{67eb6e1a-cfdd-afca-c3ab-e74eb3cad74a}">
+        <p14:section name="보충" id="{9950c56d-3202-8989-87be-44fcf6016d2d}">
           <p14:sldIdLst>
             <p14:sldId id="267"/>
           </p14:sldIdLst>
@@ -2605,7 +2605,7 @@
           <a:bodyPr wrap="square" lIns="0" tIns="0" rIns="0" bIns="0" rtlCol="0" anchor="ctr"/>
           <a:lstStyle/>
           <a:p>
-            <a:pPr algn="l" indent="0" marL="0">
+            <a:pPr eaLnBrk="0" algn="l" indent="0" marL="0">
               <a:buNone/>
             </a:pPr>
             <a:r>
@@ -2646,7 +2646,7 @@
           <a:bodyPr wrap="square" lIns="0" tIns="0" rIns="0" bIns="0" rtlCol="0" anchor="t"/>
           <a:lstStyle/>
           <a:p>
-            <a:pPr indent="0" marL="0">
+            <a:pPr eaLnBrk="0" indent="0" marL="0">
               <a:buNone/>
             </a:pPr>
             <a:r>
@@ -2712,7 +2712,7 @@
           <a:bodyPr wrap="square" lIns="0" tIns="0" rIns="0" bIns="0" rtlCol="0" anchor="ctr"/>
           <a:lstStyle/>
           <a:p>
-            <a:pPr indent="0" marL="0">
+            <a:pPr eaLnBrk="0" indent="0" marL="0">
               <a:spcAft>
                 <a:spcPts val="600"/>
               </a:spcAft>
@@ -2732,7 +2732,7 @@
             <a:endParaRPr lang="ko-KR" sz="3000" dirty="0"/>
           </a:p>
           <a:p>
-            <a:pPr indent="0" marL="0">
+            <a:pPr eaLnBrk="0" indent="0" marL="0">
               <a:spcAft>
                 <a:spcPts val="600"/>
               </a:spcAft>
@@ -2752,7 +2752,7 @@
             <a:endParaRPr lang="ko-KR" sz="3000" dirty="0"/>
           </a:p>
           <a:p>
-            <a:pPr indent="0" marL="0">
+            <a:pPr eaLnBrk="0" indent="0" marL="0">
               <a:spcAft>
                 <a:spcPts val="600"/>
               </a:spcAft>
@@ -2821,7 +2821,7 @@
           <a:bodyPr wrap="square" lIns="0" tIns="0" rIns="0" bIns="0" rtlCol="0" anchor="ctr"/>
           <a:lstStyle/>
           <a:p>
-            <a:pPr algn="l" indent="0" marL="0">
+            <a:pPr eaLnBrk="0" algn="l" indent="0" marL="0">
               <a:buNone/>
             </a:pPr>
             <a:r>
@@ -2860,7 +2860,7 @@
           <a:bodyPr wrap="square" lIns="0" tIns="0" rIns="0" bIns="0" rtlCol="0" anchor="ctr"/>
           <a:lstStyle/>
           <a:p>
-            <a:pPr algn="l" indent="0" marL="0">
+            <a:pPr eaLnBrk="0" algn="l" indent="0" marL="0">
               <a:buNone/>
             </a:pPr>
             <a:r>
@@ -2926,7 +2926,7 @@
           <a:bodyPr wrap="square" lIns="0" tIns="0" rIns="0" bIns="0" rtlCol="0" anchor="ctr"/>
           <a:lstStyle/>
           <a:p>
-            <a:pPr indent="0" marL="0">
+            <a:pPr eaLnBrk="0" indent="0" marL="0">
               <a:spcAft>
                 <a:spcPts val="600"/>
               </a:spcAft>
@@ -2976,7 +2976,7 @@
           <a:bodyPr wrap="square" lIns="0" tIns="0" rIns="0" bIns="0" rtlCol="0" anchor="ctr"/>
           <a:lstStyle/>
           <a:p>
-            <a:pPr algn="ctr" indent="0" marL="0">
+            <a:pPr eaLnBrk="0" algn="ctr" indent="0" marL="0">
               <a:buNone/>
             </a:pPr>
             <a:r>
@@ -3042,7 +3042,7 @@
           <a:bodyPr wrap="square" lIns="0" tIns="0" rIns="0" bIns="0" rtlCol="0" anchor="ctr"/>
           <a:lstStyle/>
           <a:p>
-            <a:pPr indent="0" marL="0">
+            <a:pPr eaLnBrk="0" indent="0" marL="0">
               <a:spcAft>
                 <a:spcPts val="600"/>
               </a:spcAft>
@@ -3062,7 +3062,7 @@
             <a:endParaRPr lang="ko-KR" sz="3000" dirty="0"/>
           </a:p>
           <a:p>
-            <a:pPr indent="0" marL="0">
+            <a:pPr eaLnBrk="0" indent="0" marL="0">
               <a:spcAft>
                 <a:spcPts val="600"/>
               </a:spcAft>
@@ -3112,7 +3112,7 @@
           <a:bodyPr wrap="square" lIns="0" tIns="0" rIns="0" bIns="0" rtlCol="0" anchor="ctr"/>
           <a:lstStyle/>
           <a:p>
-            <a:pPr algn="ctr" indent="0" marL="0">
+            <a:pPr eaLnBrk="0" algn="ctr" indent="0" marL="0">
               <a:buNone/>
             </a:pPr>
             <a:r>
@@ -3178,7 +3178,7 @@
           <a:bodyPr wrap="square" lIns="0" tIns="0" rIns="0" bIns="0" rtlCol="0" anchor="ctr"/>
           <a:lstStyle/>
           <a:p>
-            <a:pPr indent="0" marL="0">
+            <a:pPr eaLnBrk="0" indent="0" marL="0">
               <a:spcAft>
                 <a:spcPts val="600"/>
               </a:spcAft>
@@ -3198,7 +3198,7 @@
             <a:endParaRPr lang="ko-KR" sz="3000" dirty="0"/>
           </a:p>
           <a:p>
-            <a:pPr indent="0" marL="0">
+            <a:pPr eaLnBrk="0" indent="0" marL="0">
               <a:spcAft>
                 <a:spcPts val="600"/>
               </a:spcAft>
@@ -3248,7 +3248,7 @@
           <a:bodyPr wrap="square" lIns="0" tIns="0" rIns="0" bIns="0" rtlCol="0" anchor="ctr"/>
           <a:lstStyle/>
           <a:p>
-            <a:pPr algn="ctr" indent="0" marL="0">
+            <a:pPr eaLnBrk="0" algn="ctr" indent="0" marL="0">
               <a:buNone/>
             </a:pPr>
             <a:r>
@@ -3314,7 +3314,7 @@
           <a:bodyPr wrap="square" lIns="0" tIns="0" rIns="0" bIns="0" rtlCol="0" anchor="ctr"/>
           <a:lstStyle/>
           <a:p>
-            <a:pPr indent="0" marL="0">
+            <a:pPr eaLnBrk="0" indent="0" marL="0">
               <a:spcAft>
                 <a:spcPts val="600"/>
               </a:spcAft>
@@ -3334,7 +3334,7 @@
             <a:endParaRPr lang="ko-KR" sz="3000" dirty="0"/>
           </a:p>
           <a:p>
-            <a:pPr indent="0" marL="0">
+            <a:pPr eaLnBrk="0" indent="0" marL="0">
               <a:spcAft>
                 <a:spcPts val="600"/>
               </a:spcAft>
@@ -3394,7 +3394,7 @@
             </a:lvl1pPr>
           </a:lstStyle>
           <a:p>
-            <a:pPr algn="r"/>
+            <a:pPr eaLnBrk="0" algn="r"/>
             <a:fld id="{F7021451-1387-4CA6-816F-3879F97B5CBC}" type="slidenum">
               <a:rPr b="0" lang="en-US"/>
               <a:t>10</a:t>
@@ -3451,7 +3451,7 @@
           <a:bodyPr wrap="square" lIns="0" tIns="0" rIns="0" bIns="0" rtlCol="0" anchor="ctr"/>
           <a:lstStyle/>
           <a:p>
-            <a:pPr algn="l" indent="0" marL="0">
+            <a:pPr eaLnBrk="0" algn="l" indent="0" marL="0">
               <a:buNone/>
             </a:pPr>
             <a:r>
@@ -3517,7 +3517,7 @@
           <a:bodyPr wrap="square" lIns="0" tIns="0" rIns="0" bIns="0" rtlCol="0" anchor="ctr"/>
           <a:lstStyle/>
           <a:p>
-            <a:pPr indent="0" marL="0">
+            <a:pPr eaLnBrk="0" indent="0" marL="0">
               <a:spcAft>
                 <a:spcPts val="600"/>
               </a:spcAft>
@@ -3537,7 +3537,7 @@
             <a:endParaRPr lang="ko-KR" sz="3000" dirty="0"/>
           </a:p>
           <a:p>
-            <a:pPr indent="0" marL="0">
+            <a:pPr eaLnBrk="0" indent="0" marL="0">
               <a:spcAft>
                 <a:spcPts val="600"/>
               </a:spcAft>
@@ -3587,7 +3587,7 @@
           <a:bodyPr wrap="square" lIns="177800" tIns="0" rIns="177800" bIns="0" rtlCol="0" anchor="ctr"/>
           <a:lstStyle/>
           <a:p>
-            <a:pPr algn="l" indent="0" marL="0">
+            <a:pPr eaLnBrk="0" algn="l" indent="0" marL="0">
               <a:buNone/>
             </a:pPr>
             <a:r>
@@ -3634,7 +3634,7 @@
           <a:bodyPr wrap="square" lIns="177800" tIns="0" rIns="177800" bIns="0" rtlCol="0" anchor="ctr"/>
           <a:lstStyle/>
           <a:p>
-            <a:pPr algn="l" indent="0" marL="0">
+            <a:pPr eaLnBrk="0" algn="l" indent="0" marL="0">
               <a:buNone/>
             </a:pPr>
             <a:r>
@@ -3673,7 +3673,7 @@
           <a:bodyPr wrap="square" lIns="0" tIns="0" rIns="0" bIns="0" rtlCol="0" anchor="t"/>
           <a:lstStyle/>
           <a:p>
-            <a:pPr algn="l" indent="0" marL="0">
+            <a:pPr eaLnBrk="0" algn="l" indent="0" marL="0">
               <a:buNone/>
             </a:pPr>
             <a:r>
@@ -3712,7 +3712,7 @@
           <a:bodyPr wrap="square" lIns="0" tIns="0" rIns="0" bIns="0" rtlCol="0" anchor="ctr"/>
           <a:lstStyle/>
           <a:p>
-            <a:pPr algn="l" indent="0" marL="0">
+            <a:pPr eaLnBrk="0" algn="l" indent="0" marL="0">
               <a:buNone/>
             </a:pPr>
             <a:r>
@@ -3751,7 +3751,7 @@
           <a:bodyPr wrap="square" lIns="0" tIns="0" rIns="0" bIns="0" rtlCol="0" anchor="ctr"/>
           <a:lstStyle/>
           <a:p>
-            <a:pPr algn="l" indent="0" marL="0">
+            <a:pPr eaLnBrk="0" algn="l" indent="0" marL="0">
               <a:buNone/>
             </a:pPr>
             <a:r>
@@ -3790,7 +3790,7 @@
           <a:bodyPr wrap="square" lIns="0" tIns="0" rIns="0" bIns="0" rtlCol="0" anchor="ctr"/>
           <a:lstStyle/>
           <a:p>
-            <a:pPr algn="l" indent="0" marL="0">
+            <a:pPr eaLnBrk="0" algn="l" indent="0" marL="0">
               <a:buNone/>
             </a:pPr>
             <a:r>
@@ -3829,7 +3829,7 @@
           <a:bodyPr wrap="square" lIns="0" tIns="0" rIns="0" bIns="0" rtlCol="0" anchor="ctr"/>
           <a:lstStyle/>
           <a:p>
-            <a:pPr algn="l" indent="0" marL="0">
+            <a:pPr eaLnBrk="0" algn="l" indent="0" marL="0">
               <a:buNone/>
             </a:pPr>
             <a:r>
@@ -3886,7 +3886,7 @@
             </a:lvl1pPr>
           </a:lstStyle>
           <a:p>
-            <a:pPr algn="r"/>
+            <a:pPr eaLnBrk="0" algn="r"/>
             <a:fld id="{F7021451-1387-4CA6-816F-3879F97B5CBC}" type="slidenum">
               <a:rPr b="0" lang="en-US"/>
               <a:t>11</a:t>
@@ -3943,7 +3943,7 @@
           <a:bodyPr wrap="square" lIns="0" tIns="0" rIns="0" bIns="0" rtlCol="0" anchor="ctr"/>
           <a:lstStyle/>
           <a:p>
-            <a:pPr algn="l" indent="0" marL="0">
+            <a:pPr eaLnBrk="0" algn="l" indent="0" marL="0">
               <a:buNone/>
             </a:pPr>
             <a:r>
@@ -3982,7 +3982,7 @@
           <a:bodyPr wrap="square" lIns="0" tIns="0" rIns="0" bIns="0" rtlCol="0" anchor="ctr"/>
           <a:lstStyle/>
           <a:p>
-            <a:pPr algn="l" indent="0" marL="0">
+            <a:pPr eaLnBrk="0" algn="l" indent="0" marL="0">
               <a:buNone/>
             </a:pPr>
             <a:r>
@@ -4048,7 +4048,7 @@
           <a:bodyPr wrap="square" lIns="0" tIns="0" rIns="0" bIns="0" rtlCol="0" anchor="ctr"/>
           <a:lstStyle/>
           <a:p>
-            <a:pPr indent="0" marL="0">
+            <a:pPr eaLnBrk="0" indent="0" marL="0">
               <a:spcAft>
                 <a:spcPts val="600"/>
               </a:spcAft>
@@ -4098,7 +4098,7 @@
           <a:bodyPr wrap="square" lIns="76200" tIns="50800" rIns="76200" bIns="50800" rtlCol="0" anchor="ctr"/>
           <a:lstStyle/>
           <a:p>
-            <a:pPr algn="ctr" indent="0" marL="0">
+            <a:pPr eaLnBrk="0" algn="ctr" indent="0" marL="0">
               <a:buNone/>
             </a:pPr>
             <a:r>
@@ -4145,7 +4145,7 @@
           <a:bodyPr wrap="square" lIns="76200" tIns="50800" rIns="76200" bIns="50800" rtlCol="0" anchor="ctr"/>
           <a:lstStyle/>
           <a:p>
-            <a:pPr algn="ctr" indent="0" marL="0">
+            <a:pPr eaLnBrk="0" algn="ctr" indent="0" marL="0">
               <a:buNone/>
             </a:pPr>
             <a:r>
@@ -4192,7 +4192,7 @@
           <a:bodyPr wrap="square" lIns="76200" tIns="50800" rIns="76200" bIns="50800" rtlCol="0" anchor="ctr"/>
           <a:lstStyle/>
           <a:p>
-            <a:pPr algn="ctr" indent="0" marL="0">
+            <a:pPr eaLnBrk="0" algn="ctr" indent="0" marL="0">
               <a:buNone/>
             </a:pPr>
             <a:r>
@@ -4239,7 +4239,7 @@
           <a:bodyPr wrap="square" lIns="76200" tIns="50800" rIns="76200" bIns="50800" rtlCol="0" anchor="ctr"/>
           <a:lstStyle/>
           <a:p>
-            <a:pPr algn="ctr" indent="0" marL="0">
+            <a:pPr eaLnBrk="0" algn="ctr" indent="0" marL="0">
               <a:buNone/>
             </a:pPr>
             <a:r>
@@ -4296,7 +4296,7 @@
             </a:lvl1pPr>
           </a:lstStyle>
           <a:p>
-            <a:pPr algn="r"/>
+            <a:pPr eaLnBrk="0" algn="r"/>
             <a:fld id="{F7021451-1387-4CA6-816F-3879F97B5CBC}" type="slidenum">
               <a:rPr b="0" lang="en-US"/>
               <a:t>12</a:t>
@@ -4353,7 +4353,7 @@
           <a:bodyPr wrap="square" lIns="0" tIns="0" rIns="0" bIns="0" rtlCol="0" anchor="ctr"/>
           <a:lstStyle/>
           <a:p>
-            <a:pPr algn="l" indent="0" marL="0">
+            <a:pPr eaLnBrk="0" algn="l" indent="0" marL="0">
               <a:buNone/>
             </a:pPr>
             <a:r>
@@ -4392,7 +4392,7 @@
           <a:bodyPr wrap="square" lIns="0" tIns="0" rIns="0" bIns="0" rtlCol="0" anchor="ctr"/>
           <a:lstStyle/>
           <a:p>
-            <a:pPr algn="l" indent="0" marL="0">
+            <a:pPr eaLnBrk="0" algn="l" indent="0" marL="0">
               <a:buNone/>
             </a:pPr>
             <a:r>
@@ -4439,7 +4439,7 @@
           <a:bodyPr wrap="square" lIns="0" tIns="0" rIns="0" bIns="0" rtlCol="0" anchor="ctr"/>
           <a:lstStyle/>
           <a:p>
-            <a:pPr algn="ctr" indent="0" marL="0">
+            <a:pPr eaLnBrk="0" algn="ctr" indent="0" marL="0">
               <a:buNone/>
             </a:pPr>
             <a:r>
@@ -4478,7 +4478,7 @@
           <a:bodyPr wrap="square" lIns="0" tIns="0" rIns="0" bIns="0" rtlCol="0" anchor="ctr"/>
           <a:lstStyle/>
           <a:p>
-            <a:pPr algn="l" indent="0" marL="0">
+            <a:pPr eaLnBrk="0" algn="l" indent="0" marL="0">
               <a:buNone/>
             </a:pPr>
             <a:r>
@@ -4525,7 +4525,7 @@
           <a:bodyPr wrap="square" lIns="0" tIns="0" rIns="0" bIns="0" rtlCol="0" anchor="ctr"/>
           <a:lstStyle/>
           <a:p>
-            <a:pPr algn="ctr" indent="0" marL="0">
+            <a:pPr eaLnBrk="0" algn="ctr" indent="0" marL="0">
               <a:buNone/>
             </a:pPr>
             <a:r>
@@ -4564,7 +4564,7 @@
           <a:bodyPr wrap="square" lIns="0" tIns="0" rIns="0" bIns="0" rtlCol="0" anchor="ctr"/>
           <a:lstStyle/>
           <a:p>
-            <a:pPr algn="l" indent="0" marL="0">
+            <a:pPr eaLnBrk="0" algn="l" indent="0" marL="0">
               <a:buNone/>
             </a:pPr>
             <a:r>
@@ -4621,7 +4621,7 @@
             </a:lvl1pPr>
           </a:lstStyle>
           <a:p>
-            <a:pPr algn="r"/>
+            <a:pPr eaLnBrk="0" algn="r"/>
             <a:fld id="{F7021451-1387-4CA6-816F-3879F97B5CBC}" type="slidenum">
               <a:rPr b="0" lang="en-US"/>
               <a:t>2</a:t>
@@ -4678,7 +4678,7 @@
           <a:bodyPr wrap="square" lIns="0" tIns="0" rIns="0" bIns="0" rtlCol="0" anchor="ctr"/>
           <a:lstStyle/>
           <a:p>
-            <a:pPr algn="l" indent="0" marL="0">
+            <a:pPr eaLnBrk="0" algn="l" indent="0" marL="0">
               <a:buNone/>
             </a:pPr>
             <a:r>
@@ -4744,7 +4744,7 @@
           <a:bodyPr wrap="square" lIns="0" tIns="0" rIns="0" bIns="0" rtlCol="0" anchor="ctr"/>
           <a:lstStyle/>
           <a:p>
-            <a:pPr indent="0" marL="0">
+            <a:pPr eaLnBrk="0" indent="0" marL="0">
               <a:spcAft>
                 <a:spcPts val="600"/>
               </a:spcAft>
@@ -4813,7 +4813,7 @@
           <a:bodyPr wrap="square" lIns="0" tIns="0" rIns="0" bIns="0" rtlCol="0" anchor="ctr"/>
           <a:lstStyle/>
           <a:p>
-            <a:pPr indent="0" marL="0">
+            <a:pPr eaLnBrk="0" indent="0" marL="0">
               <a:spcAft>
                 <a:spcPts val="600"/>
               </a:spcAft>
@@ -4833,7 +4833,7 @@
             <a:endParaRPr lang="ko-KR" sz="3000" dirty="0"/>
           </a:p>
           <a:p>
-            <a:pPr indent="0" marL="0">
+            <a:pPr eaLnBrk="0" indent="0" marL="0">
               <a:spcAft>
                 <a:spcPts val="600"/>
               </a:spcAft>
@@ -4902,7 +4902,7 @@
           <a:bodyPr wrap="square" lIns="0" tIns="0" rIns="0" bIns="0" rtlCol="0" anchor="ctr"/>
           <a:lstStyle/>
           <a:p>
-            <a:pPr indent="0" marL="0">
+            <a:pPr eaLnBrk="0" indent="0" marL="0">
               <a:spcAft>
                 <a:spcPts val="600"/>
               </a:spcAft>
@@ -4922,7 +4922,7 @@
             <a:endParaRPr lang="ko-KR" sz="3000" dirty="0"/>
           </a:p>
           <a:p>
-            <a:pPr indent="0" marL="0">
+            <a:pPr eaLnBrk="0" indent="0" marL="0">
               <a:spcAft>
                 <a:spcPts val="600"/>
               </a:spcAft>
@@ -4991,7 +4991,7 @@
           <a:bodyPr wrap="square" lIns="0" tIns="0" rIns="0" bIns="0" rtlCol="0" anchor="ctr"/>
           <a:lstStyle/>
           <a:p>
-            <a:pPr indent="0" marL="0">
+            <a:pPr eaLnBrk="0" indent="0" marL="0">
               <a:spcAft>
                 <a:spcPts val="600"/>
               </a:spcAft>
@@ -5011,7 +5011,7 @@
             <a:endParaRPr lang="ko-KR" sz="3000" dirty="0"/>
           </a:p>
           <a:p>
-            <a:pPr indent="0" marL="0">
+            <a:pPr eaLnBrk="0" indent="0" marL="0">
               <a:spcAft>
                 <a:spcPts val="600"/>
               </a:spcAft>
@@ -5071,7 +5071,7 @@
             </a:lvl1pPr>
           </a:lstStyle>
           <a:p>
-            <a:pPr algn="r"/>
+            <a:pPr eaLnBrk="0" algn="r"/>
             <a:fld id="{F7021451-1387-4CA6-816F-3879F97B5CBC}" type="slidenum">
               <a:rPr b="0" lang="en-US"/>
               <a:t>3</a:t>
@@ -5128,7 +5128,7 @@
           <a:bodyPr wrap="square" lIns="0" tIns="0" rIns="0" bIns="0" rtlCol="0" anchor="ctr"/>
           <a:lstStyle/>
           <a:p>
-            <a:pPr algn="l" indent="0" marL="0">
+            <a:pPr eaLnBrk="0" algn="l" indent="0" marL="0">
               <a:buNone/>
             </a:pPr>
             <a:r>
@@ -5167,7 +5167,7 @@
           <a:bodyPr wrap="square" lIns="0" tIns="0" rIns="0" bIns="0" rtlCol="0" anchor="ctr"/>
           <a:lstStyle/>
           <a:p>
-            <a:pPr algn="l" indent="0" marL="0">
+            <a:pPr eaLnBrk="0" algn="l" indent="0" marL="0">
               <a:buNone/>
             </a:pPr>
             <a:r>
@@ -5214,7 +5214,7 @@
           <a:bodyPr wrap="square" lIns="76200" tIns="50800" rIns="76200" bIns="50800" rtlCol="0" anchor="ctr"/>
           <a:lstStyle/>
           <a:p>
-            <a:pPr algn="ctr" indent="0" marL="0">
+            <a:pPr eaLnBrk="0" algn="ctr" indent="0" marL="0">
               <a:buNone/>
             </a:pPr>
             <a:r>
@@ -5261,7 +5261,7 @@
           <a:bodyPr wrap="square" lIns="76200" tIns="50800" rIns="76200" bIns="50800" rtlCol="0" anchor="ctr"/>
           <a:lstStyle/>
           <a:p>
-            <a:pPr algn="ctr" indent="0" marL="0">
+            <a:pPr eaLnBrk="0" algn="ctr" indent="0" marL="0">
               <a:buNone/>
             </a:pPr>
             <a:r>
@@ -5308,7 +5308,7 @@
           <a:bodyPr wrap="square" lIns="76200" tIns="50800" rIns="76200" bIns="50800" rtlCol="0" anchor="ctr"/>
           <a:lstStyle/>
           <a:p>
-            <a:pPr algn="ctr" indent="0" marL="0">
+            <a:pPr eaLnBrk="0" algn="ctr" indent="0" marL="0">
               <a:buNone/>
             </a:pPr>
             <a:r>
@@ -5355,7 +5355,7 @@
           <a:bodyPr wrap="square" lIns="76200" tIns="50800" rIns="76200" bIns="50800" rtlCol="0" anchor="ctr"/>
           <a:lstStyle/>
           <a:p>
-            <a:pPr algn="ctr" indent="0" marL="0">
+            <a:pPr eaLnBrk="0" algn="ctr" indent="0" marL="0">
               <a:buNone/>
             </a:pPr>
             <a:r>
@@ -5402,7 +5402,7 @@
           <a:bodyPr wrap="square" lIns="76200" tIns="50800" rIns="76200" bIns="50800" rtlCol="0" anchor="ctr"/>
           <a:lstStyle/>
           <a:p>
-            <a:pPr algn="ctr" indent="0" marL="0">
+            <a:pPr eaLnBrk="0" algn="ctr" indent="0" marL="0">
               <a:buNone/>
             </a:pPr>
             <a:r>
@@ -5449,7 +5449,7 @@
           <a:bodyPr wrap="square" lIns="76200" tIns="50800" rIns="76200" bIns="50800" rtlCol="0" anchor="ctr"/>
           <a:lstStyle/>
           <a:p>
-            <a:pPr algn="ctr" indent="0" marL="0">
+            <a:pPr eaLnBrk="0" algn="ctr" indent="0" marL="0">
               <a:buNone/>
             </a:pPr>
             <a:r>
@@ -5496,7 +5496,7 @@
           <a:bodyPr wrap="square" lIns="76200" tIns="50800" rIns="76200" bIns="50800" rtlCol="0" anchor="ctr"/>
           <a:lstStyle/>
           <a:p>
-            <a:pPr algn="ctr" indent="0" marL="0">
+            <a:pPr eaLnBrk="0" algn="ctr" indent="0" marL="0">
               <a:buNone/>
             </a:pPr>
             <a:r>
@@ -5543,7 +5543,7 @@
           <a:bodyPr wrap="square" lIns="76200" tIns="50800" rIns="76200" bIns="50800" rtlCol="0" anchor="ctr"/>
           <a:lstStyle/>
           <a:p>
-            <a:pPr algn="ctr" indent="0" marL="0">
+            <a:pPr eaLnBrk="0" algn="ctr" indent="0" marL="0">
               <a:buNone/>
             </a:pPr>
             <a:r>
@@ -5600,7 +5600,7 @@
             </a:lvl1pPr>
           </a:lstStyle>
           <a:p>
-            <a:pPr algn="r"/>
+            <a:pPr eaLnBrk="0" algn="r"/>
             <a:fld id="{F7021451-1387-4CA6-816F-3879F97B5CBC}" type="slidenum">
               <a:rPr b="0" lang="en-US"/>
               <a:t>4</a:t>
@@ -5657,7 +5657,7 @@
           <a:bodyPr wrap="square" lIns="0" tIns="0" rIns="0" bIns="0" rtlCol="0" anchor="ctr"/>
           <a:lstStyle/>
           <a:p>
-            <a:pPr algn="l" indent="0" marL="0">
+            <a:pPr eaLnBrk="0" algn="l" indent="0" marL="0">
               <a:buNone/>
             </a:pPr>
             <a:r>
@@ -5723,7 +5723,7 @@
           <a:bodyPr wrap="square" lIns="0" tIns="0" rIns="0" bIns="0" rtlCol="0" anchor="ctr"/>
           <a:lstStyle/>
           <a:p>
-            <a:pPr indent="0" marL="0">
+            <a:pPr eaLnBrk="0" indent="0" marL="0">
               <a:spcAft>
                 <a:spcPts val="600"/>
               </a:spcAft>
@@ -5792,7 +5792,7 @@
           <a:bodyPr wrap="square" lIns="0" tIns="0" rIns="0" bIns="0" rtlCol="0" anchor="t"/>
           <a:lstStyle/>
           <a:p>
-            <a:pPr indent="0" marL="0">
+            <a:pPr eaLnBrk="0" algn="l" indent="0" marL="0">
               <a:lnSpc>
                 <a:spcPct val="105000"/>
               </a:lnSpc>
@@ -5855,7 +5855,7 @@
             </a:lvl1pPr>
           </a:lstStyle>
           <a:p>
-            <a:pPr algn="r"/>
+            <a:pPr eaLnBrk="0" algn="r"/>
             <a:fld id="{F7021451-1387-4CA6-816F-3879F97B5CBC}" type="slidenum">
               <a:rPr b="0" lang="en-US"/>
               <a:t>5</a:t>
@@ -5912,7 +5912,7 @@
           <a:bodyPr wrap="square" lIns="0" tIns="0" rIns="0" bIns="0" rtlCol="0" anchor="ctr"/>
           <a:lstStyle/>
           <a:p>
-            <a:pPr algn="l" indent="0" marL="0">
+            <a:pPr eaLnBrk="0" algn="l" indent="0" marL="0">
               <a:buNone/>
             </a:pPr>
             <a:r>
@@ -5978,7 +5978,7 @@
           <a:bodyPr wrap="square" lIns="0" tIns="0" rIns="0" bIns="0" rtlCol="0" anchor="ctr"/>
           <a:lstStyle/>
           <a:p>
-            <a:pPr indent="0" marL="0">
+            <a:pPr eaLnBrk="0" indent="0" marL="0">
               <a:spcAft>
                 <a:spcPts val="600"/>
               </a:spcAft>
@@ -6026,7 +6026,7 @@
           <a:bodyPr wrap="square" lIns="0" tIns="0" rIns="0" bIns="0" rtlCol="0" anchor="ctr"/>
           <a:lstStyle/>
           <a:p>
-            <a:pPr algn="ctr" indent="0" marL="0">
+            <a:pPr eaLnBrk="0" algn="ctr" indent="0" marL="0">
               <a:buNone/>
             </a:pPr>
             <a:r>
@@ -6065,7 +6065,7 @@
           <a:bodyPr wrap="square" lIns="0" tIns="0" rIns="0" bIns="0" rtlCol="0" anchor="t"/>
           <a:lstStyle/>
           <a:p>
-            <a:pPr algn="l" indent="0" marL="0">
+            <a:pPr eaLnBrk="0" algn="l" indent="0" marL="0">
               <a:buNone/>
             </a:pPr>
             <a:r>
@@ -6110,7 +6110,7 @@
           <a:bodyPr wrap="square" lIns="0" tIns="0" rIns="0" bIns="0" rtlCol="0" anchor="ctr"/>
           <a:lstStyle/>
           <a:p>
-            <a:pPr algn="ctr" indent="0" marL="0">
+            <a:pPr eaLnBrk="0" algn="ctr" indent="0" marL="0">
               <a:buNone/>
             </a:pPr>
             <a:r>
@@ -6149,7 +6149,7 @@
           <a:bodyPr wrap="square" lIns="0" tIns="0" rIns="0" bIns="0" rtlCol="0" anchor="t"/>
           <a:lstStyle/>
           <a:p>
-            <a:pPr algn="l" indent="0" marL="0">
+            <a:pPr eaLnBrk="0" algn="l" indent="0" marL="0">
               <a:buNone/>
             </a:pPr>
             <a:r>
@@ -6194,7 +6194,7 @@
           <a:bodyPr wrap="square" lIns="0" tIns="0" rIns="0" bIns="0" rtlCol="0" anchor="ctr"/>
           <a:lstStyle/>
           <a:p>
-            <a:pPr algn="ctr" indent="0" marL="0">
+            <a:pPr eaLnBrk="0" algn="ctr" indent="0" marL="0">
               <a:buNone/>
             </a:pPr>
             <a:r>
@@ -6233,7 +6233,7 @@
           <a:bodyPr wrap="square" lIns="0" tIns="0" rIns="0" bIns="0" rtlCol="0" anchor="t"/>
           <a:lstStyle/>
           <a:p>
-            <a:pPr algn="l" indent="0" marL="0">
+            <a:pPr eaLnBrk="0" algn="l" indent="0" marL="0">
               <a:buNone/>
             </a:pPr>
             <a:r>
@@ -6278,7 +6278,7 @@
           <a:bodyPr wrap="square" lIns="0" tIns="0" rIns="0" bIns="0" rtlCol="0" anchor="ctr"/>
           <a:lstStyle/>
           <a:p>
-            <a:pPr algn="ctr" indent="0" marL="0">
+            <a:pPr eaLnBrk="0" algn="ctr" indent="0" marL="0">
               <a:buNone/>
             </a:pPr>
             <a:r>
@@ -6317,7 +6317,7 @@
           <a:bodyPr wrap="square" lIns="0" tIns="0" rIns="0" bIns="0" rtlCol="0" anchor="t"/>
           <a:lstStyle/>
           <a:p>
-            <a:pPr algn="l" indent="0" marL="0">
+            <a:pPr eaLnBrk="0" algn="l" indent="0" marL="0">
               <a:buNone/>
             </a:pPr>
             <a:r>
@@ -6374,7 +6374,7 @@
             </a:lvl1pPr>
           </a:lstStyle>
           <a:p>
-            <a:pPr algn="r"/>
+            <a:pPr eaLnBrk="0" algn="r"/>
             <a:fld id="{F7021451-1387-4CA6-816F-3879F97B5CBC}" type="slidenum">
               <a:rPr b="0" lang="en-US"/>
               <a:t>6</a:t>
@@ -6431,7 +6431,7 @@
           <a:bodyPr wrap="square" lIns="0" tIns="0" rIns="0" bIns="0" rtlCol="0" anchor="ctr"/>
           <a:lstStyle/>
           <a:p>
-            <a:pPr algn="l" indent="0" marL="0">
+            <a:pPr eaLnBrk="0" algn="l" indent="0" marL="0">
               <a:buNone/>
             </a:pPr>
             <a:r>
@@ -6497,7 +6497,7 @@
           <a:bodyPr wrap="square" lIns="0" tIns="0" rIns="0" bIns="0" rtlCol="0" anchor="ctr"/>
           <a:lstStyle/>
           <a:p>
-            <a:pPr indent="0" marL="0">
+            <a:pPr eaLnBrk="0" indent="0" marL="0">
               <a:spcAft>
                 <a:spcPts val="600"/>
               </a:spcAft>
@@ -6566,7 +6566,7 @@
           <a:bodyPr wrap="square" lIns="0" tIns="0" rIns="0" bIns="0" rtlCol="0" anchor="t"/>
           <a:lstStyle/>
           <a:p>
-            <a:pPr indent="0" marL="0">
+            <a:pPr eaLnBrk="0" algn="l" indent="0" marL="0">
               <a:lnSpc>
                 <a:spcPct val="105000"/>
               </a:lnSpc>
@@ -6629,7 +6629,7 @@
             </a:lvl1pPr>
           </a:lstStyle>
           <a:p>
-            <a:pPr algn="r"/>
+            <a:pPr eaLnBrk="0" algn="r"/>
             <a:fld id="{F7021451-1387-4CA6-816F-3879F97B5CBC}" type="slidenum">
               <a:rPr b="0" lang="en-US"/>
               <a:t>7</a:t>
@@ -6686,7 +6686,7 @@
           <a:bodyPr wrap="square" lIns="0" tIns="0" rIns="0" bIns="0" rtlCol="0" anchor="ctr"/>
           <a:lstStyle/>
           <a:p>
-            <a:pPr algn="l" indent="0" marL="0">
+            <a:pPr eaLnBrk="0" algn="l" indent="0" marL="0">
               <a:buNone/>
             </a:pPr>
             <a:r>
@@ -6752,7 +6752,7 @@
           <a:bodyPr wrap="square" lIns="0" tIns="0" rIns="0" bIns="0" rtlCol="0" anchor="ctr"/>
           <a:lstStyle/>
           <a:p>
-            <a:pPr indent="0" marL="0">
+            <a:pPr eaLnBrk="0" indent="0" marL="0">
               <a:spcAft>
                 <a:spcPts val="600"/>
               </a:spcAft>
@@ -6821,7 +6821,7 @@
           <a:bodyPr wrap="square" lIns="0" tIns="0" rIns="0" bIns="0" rtlCol="0" anchor="ctr"/>
           <a:lstStyle/>
           <a:p>
-            <a:pPr indent="0" marL="0">
+            <a:pPr eaLnBrk="0" indent="0" marL="0">
               <a:spcAft>
                 <a:spcPts val="600"/>
               </a:spcAft>
@@ -6871,7 +6871,7 @@
           <a:bodyPr wrap="square" lIns="177800" tIns="0" rIns="177800" bIns="0" rtlCol="0" anchor="ctr"/>
           <a:lstStyle/>
           <a:p>
-            <a:pPr algn="l" indent="0" marL="0">
+            <a:pPr eaLnBrk="0" algn="l" indent="0" marL="0">
               <a:buNone/>
             </a:pPr>
             <a:r>
@@ -6910,7 +6910,7 @@
           <a:bodyPr wrap="square" lIns="0" tIns="0" rIns="0" bIns="0" rtlCol="0" anchor="t"/>
           <a:lstStyle/>
           <a:p>
-            <a:pPr algn="l" indent="0" marL="0">
+            <a:pPr eaLnBrk="0" algn="l" indent="0" marL="0">
               <a:buNone/>
             </a:pPr>
             <a:r>
@@ -6927,7 +6927,7 @@
             <a:endParaRPr lang="ko-KR" sz="3000" dirty="0"/>
           </a:p>
           <a:p>
-            <a:pPr algn="l" indent="0" marL="0">
+            <a:pPr eaLnBrk="0" algn="l" indent="0" marL="0">
               <a:buNone/>
             </a:pPr>
             <a:r>
@@ -6974,7 +6974,7 @@
           <a:bodyPr wrap="square" lIns="177800" tIns="0" rIns="177800" bIns="0" rtlCol="0" anchor="ctr"/>
           <a:lstStyle/>
           <a:p>
-            <a:pPr algn="l" indent="0" marL="0">
+            <a:pPr eaLnBrk="0" algn="l" indent="0" marL="0">
               <a:buNone/>
             </a:pPr>
             <a:r>
@@ -7013,7 +7013,7 @@
           <a:bodyPr wrap="square" lIns="0" tIns="0" rIns="0" bIns="0" rtlCol="0" anchor="t"/>
           <a:lstStyle/>
           <a:p>
-            <a:pPr algn="l" indent="0" marL="0">
+            <a:pPr eaLnBrk="0" algn="l" indent="0" marL="0">
               <a:buNone/>
             </a:pPr>
             <a:r>
@@ -7030,7 +7030,7 @@
             <a:endParaRPr lang="ko-KR" sz="3000" dirty="0"/>
           </a:p>
           <a:p>
-            <a:pPr algn="l" indent="0" marL="0">
+            <a:pPr eaLnBrk="0" algn="l" indent="0" marL="0">
               <a:buNone/>
             </a:pPr>
             <a:r>
@@ -7087,7 +7087,7 @@
             </a:lvl1pPr>
           </a:lstStyle>
           <a:p>
-            <a:pPr algn="r"/>
+            <a:pPr eaLnBrk="0" algn="r"/>
             <a:fld id="{F7021451-1387-4CA6-816F-3879F97B5CBC}" type="slidenum">
               <a:rPr b="0" lang="en-US"/>
               <a:t>8</a:t>
@@ -7144,7 +7144,7 @@
           <a:bodyPr wrap="square" lIns="0" tIns="0" rIns="0" bIns="0" rtlCol="0" anchor="ctr"/>
           <a:lstStyle/>
           <a:p>
-            <a:pPr algn="l" indent="0" marL="0">
+            <a:pPr eaLnBrk="0" algn="l" indent="0" marL="0">
               <a:buNone/>
             </a:pPr>
             <a:r>
@@ -7210,7 +7210,7 @@
           <a:bodyPr wrap="square" lIns="0" tIns="0" rIns="0" bIns="0" rtlCol="0" anchor="ctr"/>
           <a:lstStyle/>
           <a:p>
-            <a:pPr indent="0" marL="0">
+            <a:pPr eaLnBrk="0" indent="0" marL="0">
               <a:spcAft>
                 <a:spcPts val="600"/>
               </a:spcAft>
@@ -7279,7 +7279,7 @@
           <a:bodyPr wrap="square" lIns="0" tIns="0" rIns="0" bIns="0" rtlCol="0" anchor="t"/>
           <a:lstStyle/>
           <a:p>
-            <a:pPr indent="0" marL="0">
+            <a:pPr eaLnBrk="0" algn="l" indent="0" marL="0">
               <a:lnSpc>
                 <a:spcPct val="105000"/>
               </a:lnSpc>
@@ -7342,7 +7342,7 @@
             </a:lvl1pPr>
           </a:lstStyle>
           <a:p>
-            <a:pPr algn="r"/>
+            <a:pPr eaLnBrk="0" algn="r"/>
             <a:fld id="{F7021451-1387-4CA6-816F-3879F97B5CBC}" type="slidenum">
               <a:rPr b="0" lang="en-US"/>
               <a:t>9</a:t>

--- a/dist/초3/국어/문학과매체/초3_국어_문학과매체_01_인물의마음과까닭_학생용.pptx
+++ b/dist/초3/국어/문학과매체/초3_국어_문학과매체_01_인물의마음과까닭_학생용.pptx
@@ -118,13 +118,13 @@
   <p:extLst>
     <p:ext uri="{521415D9-36F7-43E2-AB2F-B90AF26B5E84}">
       <p14:sectionLst xmlns:p14="http://schemas.microsoft.com/office/powerpoint/2010/main">
-        <p14:section name="도입" id="{7dc286fe-4647-fffe-a6cf-b740caef0308}">
+        <p14:section name="도입" id="{1c06bcab-6f7e-93a4-5ac8-55382cc32fb6}">
           <p14:sldIdLst>
             <p14:sldId id="256"/>
             <p14:sldId id="257"/>
           </p14:sldIdLst>
         </p14:section>
-        <p14:section name="개념" id="{d16e2a35-f4e8-b981-b11b-c81be4eba648}">
+        <p14:section name="개념" id="{c03c7d84-d0b4-dc1a-6c0c-50525abc282b}">
           <p14:sldIdLst>
             <p14:sldId id="258"/>
             <p14:sldId id="259"/>
@@ -132,24 +132,24 @@
             <p14:sldId id="261"/>
           </p14:sldIdLst>
         </p14:section>
-        <p14:section name="연습" id="{06e96b9c-2853-d48b-c42b-71ea0a6b8a93}">
+        <p14:section name="연습" id="{4df2d91f-6671-32ff-5a7f-54478eb7f966}">
           <p14:sldIdLst>
             <p14:sldId id="262"/>
             <p14:sldId id="263"/>
           </p14:sldIdLst>
         </p14:section>
-        <p14:section name="확인" id="{e9b22bb5-e060-3d46-69fd-66f21bae191d}">
+        <p14:section name="확인" id="{5c0a561e-44be-1511-c7b3-8e7af3616d8d}">
           <p14:sldIdLst>
             <p14:sldId id="264"/>
             <p14:sldId id="265"/>
           </p14:sldIdLst>
         </p14:section>
-        <p14:section name="정리" id="{b8e82792-3978-3b85-8f0a-aa8283b9e1b4}">
+        <p14:section name="정리" id="{1ff7a5ff-d362-d88b-468b-f539fce049b9}">
           <p14:sldIdLst>
             <p14:sldId id="266"/>
           </p14:sldIdLst>
         </p14:section>
-        <p14:section name="보충" id="{9950c56d-3202-8989-87be-44fcf6016d2d}">
+        <p14:section name="보충" id="{76d710c9-5297-63af-bd32-3e2c7fd6b934}">
           <p14:sldIdLst>
             <p14:sldId id="267"/>
           </p14:sldIdLst>
